--- a/apps/resources/bundled_files/6-klass-bagyttalgan-sandar-amaldardyn-tartibi-sabak.pptx
+++ b/apps/resources/bundled_files/6-klass-bagyttalgan-sandar-amaldardyn-tartibi-sabak.pptx
@@ -5196,7 +5196,7 @@
                 </a:solidFill>
                 <a:latin typeface="PT Sans"/>
               </a:rPr>
-              <a:t>6-класс · Математика</a:t>
+              <a:t/>
             </a:r>
           </a:p>
         </p:txBody>
@@ -5688,7 +5688,7 @@
                 </a:solidFill>
                 <a:latin typeface="PT Sans"/>
               </a:rPr>
-              <a:t>6-класс ›</a:t>
+              <a:t/>
             </a:r>
           </a:p>
           <a:p>
@@ -6637,7 +6637,7 @@
                 </a:solidFill>
                 <a:latin typeface="PT Sans"/>
               </a:rPr>
-              <a:t>6-класс ›</a:t>
+              <a:t/>
             </a:r>
           </a:p>
           <a:p>
@@ -9594,7 +9594,7 @@
                 </a:solidFill>
                 <a:latin typeface="PT Sans"/>
               </a:rPr>
-              <a:t>6-класс ›</a:t>
+              <a:t/>
             </a:r>
           </a:p>
           <a:p>
@@ -12108,7 +12108,7 @@
                 </a:solidFill>
                 <a:latin typeface="PT Sans"/>
               </a:rPr>
-              <a:t>6-класс ›</a:t>
+              <a:t/>
             </a:r>
           </a:p>
           <a:p>
@@ -13691,7 +13691,7 @@
                 </a:solidFill>
                 <a:latin typeface="PT Sans"/>
               </a:rPr>
-              <a:t>6-класс ›</a:t>
+              <a:t/>
             </a:r>
           </a:p>
           <a:p>
@@ -14481,7 +14481,7 @@
                 </a:solidFill>
                 <a:latin typeface="PT Sans"/>
               </a:rPr>
-              <a:t>6-класс ›</a:t>
+              <a:t/>
             </a:r>
           </a:p>
           <a:p>
@@ -15271,7 +15271,7 @@
                 </a:solidFill>
                 <a:latin typeface="PT Sans"/>
               </a:rPr>
-              <a:t>6-класс ›</a:t>
+              <a:t/>
             </a:r>
           </a:p>
           <a:p>
@@ -16937,7 +16937,7 @@
                 </a:solidFill>
                 <a:latin typeface="PT Sans"/>
               </a:rPr>
-              <a:t>6-класс ›</a:t>
+              <a:t/>
             </a:r>
           </a:p>
           <a:p>
@@ -18021,7 +18021,7 @@
                 </a:solidFill>
                 <a:latin typeface="PT Sans"/>
               </a:rPr>
-              <a:t>6-класс ›</a:t>
+              <a:t/>
             </a:r>
           </a:p>
           <a:p>
@@ -19551,7 +19551,7 @@
                 </a:solidFill>
                 <a:latin typeface="PT Sans"/>
               </a:rPr>
-              <a:t>6-класс ›</a:t>
+              <a:t/>
             </a:r>
           </a:p>
           <a:p>
@@ -21469,7 +21469,7 @@
                 </a:solidFill>
                 <a:latin typeface="PT Sans"/>
               </a:rPr>
-              <a:t>6-класс ›</a:t>
+              <a:t/>
             </a:r>
           </a:p>
           <a:p>
@@ -22746,7 +22746,7 @@
                 </a:solidFill>
                 <a:latin typeface="PT Sans"/>
               </a:rPr>
-              <a:t>6-класс ›</a:t>
+              <a:t/>
             </a:r>
           </a:p>
           <a:p>
@@ -24174,7 +24174,7 @@
                 </a:solidFill>
                 <a:latin typeface="PT Sans"/>
               </a:rPr>
-              <a:t>6-класс ›</a:t>
+              <a:t/>
             </a:r>
           </a:p>
           <a:p>
@@ -25630,7 +25630,7 @@
                 </a:solidFill>
                 <a:latin typeface="PT Sans"/>
               </a:rPr>
-              <a:t>6-класс ›</a:t>
+              <a:t/>
             </a:r>
           </a:p>
           <a:p>
@@ -26981,7 +26981,7 @@
                 </a:solidFill>
                 <a:latin typeface="PT Sans"/>
               </a:rPr>
-              <a:t>6-класс ›</a:t>
+              <a:t/>
             </a:r>
           </a:p>
           <a:p>
@@ -27781,7 +27781,7 @@
                 </a:solidFill>
                 <a:latin typeface="PT Sans"/>
               </a:rPr>
-              <a:t>6-класс ›</a:t>
+              <a:t/>
             </a:r>
           </a:p>
           <a:p>
@@ -28622,7 +28622,7 @@
                 </a:solidFill>
                 <a:latin typeface="PT Sans"/>
               </a:rPr>
-              <a:t>6-класс ›</a:t>
+              <a:t/>
             </a:r>
           </a:p>
           <a:p>
@@ -29571,7 +29571,7 @@
                 </a:solidFill>
                 <a:latin typeface="PT Sans"/>
               </a:rPr>
-              <a:t>6-класс ›</a:t>
+              <a:t/>
             </a:r>
           </a:p>
           <a:p>
@@ -31025,7 +31025,7 @@
                 </a:solidFill>
                 <a:latin typeface="PT Sans"/>
               </a:rPr>
-              <a:t>6-класс ›</a:t>
+              <a:t/>
             </a:r>
           </a:p>
           <a:p>
@@ -31771,7 +31771,7 @@
                 </a:solidFill>
                 <a:latin typeface="PT Sans"/>
               </a:rPr>
-              <a:t>6-класс ›</a:t>
+              <a:t/>
             </a:r>
           </a:p>
           <a:p>
@@ -32579,7 +32579,7 @@
                 </a:solidFill>
                 <a:latin typeface="PT Sans"/>
               </a:rPr>
-              <a:t>6-класс ›</a:t>
+              <a:t/>
             </a:r>
           </a:p>
           <a:p>
@@ -33770,7 +33770,7 @@
                 </a:solidFill>
                 <a:latin typeface="PT Sans"/>
               </a:rPr>
-              <a:t>6-класс ›</a:t>
+              <a:t/>
             </a:r>
           </a:p>
           <a:p>
@@ -34949,7 +34949,7 @@
                 </a:solidFill>
                 <a:latin typeface="PT Sans"/>
               </a:rPr>
-              <a:t>6-класс ›</a:t>
+              <a:t/>
             </a:r>
           </a:p>
           <a:p>
@@ -35130,7 +35130,7 @@
                 </a:solidFill>
                 <a:latin typeface="PT Sans"/>
               </a:rPr>
-              <a:t>4-класс</a:t>
+              <a:t/>
             </a:r>
           </a:p>
         </p:txBody>
@@ -35310,7 +35310,7 @@
                 </a:solidFill>
                 <a:latin typeface="PT Sans"/>
               </a:rPr>
-              <a:t>5-класс</a:t>
+              <a:t/>
             </a:r>
           </a:p>
         </p:txBody>
@@ -35490,7 +35490,7 @@
                 </a:solidFill>
                 <a:latin typeface="PT Sans"/>
               </a:rPr>
-              <a:t>6-класс</a:t>
+              <a:t/>
             </a:r>
           </a:p>
         </p:txBody>
@@ -35726,7 +35726,7 @@
                 </a:solidFill>
                 <a:latin typeface="PT Sans"/>
               </a:rPr>
-              <a:t>7-класс</a:t>
+              <a:t/>
             </a:r>
           </a:p>
         </p:txBody>
@@ -36146,7 +36146,7 @@
                 </a:solidFill>
                 <a:latin typeface="PT Sans"/>
               </a:rPr>
-              <a:t>6-класс ›</a:t>
+              <a:t/>
             </a:r>
           </a:p>
           <a:p>
@@ -37294,7 +37294,7 @@
                 </a:solidFill>
                 <a:latin typeface="PT Sans"/>
               </a:rPr>
-              <a:t>6-класс ›</a:t>
+              <a:t/>
             </a:r>
           </a:p>
           <a:p>

--- a/apps/resources/bundled_files/6-klass-bagyttalgan-sandar-amaldardyn-tartibi-sabak.pptx
+++ b/apps/resources/bundled_files/6-klass-bagyttalgan-sandar-amaldardyn-tartibi-sabak.pptx
@@ -1582,7 +1582,7 @@
           <a:lstStyle/>
           <a:p>
             <a:r>
-              <a:t>Ой жүгүртүү маданияты (Wenxi Lee, 2.6).</a:t>
+              <a:t>Ой жүгүртүү маданияты (Wenxi Lee, 2,6).</a:t>
             </a:r>
           </a:p>
         </p:txBody>
@@ -9775,7 +9775,7 @@
                 </a:solidFill>
                 <a:latin typeface="PT Sans"/>
               </a:rPr>
-              <a:t>+8 °Cдан баштап сан огунда 4 жолу −2, анан −3 секирип көр.</a:t>
+              <a:t>+8 °Сдан баштап сан огунда 4 жолу −2, анан −3 секирип көр.</a:t>
             </a:r>
           </a:p>
         </p:txBody>
@@ -18255,7 +18255,7 @@
                 </a:solidFill>
                 <a:latin typeface="PT Sans"/>
               </a:rPr>
-              <a:t>Ар бир 300 м өйдө чыкканда аба 2 °Cга муздайт. Топ 1 500 м көтөрүлдү. Температура канчага өзгөрдү?</a:t>
+              <a:t>Ар бир 300 м өйдө чыкканда аба 2 °Сга муздайт. Топ 1 500 м көтөрүлдү. Температура канчага өзгөрдү?</a:t>
             </a:r>
           </a:p>
         </p:txBody>
@@ -18582,7 +18582,7 @@
                 </a:solidFill>
                 <a:latin typeface="PT Sans"/>
               </a:rPr>
-              <a:t>Таңда кепеде −4 °C. Күн чыккандан кийин 3 саат бою ар саатта 3 °Cга жылыды. Канча градус болду?</a:t>
+              <a:t>Таңда кепеде −4 °C. Күн чыккандан кийин 3 саат бою ар саатта 3 °Сга жылыды. Канча градус болду?</a:t>
             </a:r>
           </a:p>
         </p:txBody>
@@ -19785,7 +19785,7 @@
                 </a:solidFill>
                 <a:latin typeface="PT Sans"/>
               </a:rPr>
-              <a:t>Ар бир 300 м өйдө чыкканда аба 2 °Cга муздайт. Топ 1 500 м көтөрүлдү. Температура канчага өзгөрдү?</a:t>
+              <a:t>Ар бир 300 м өйдө чыкканда аба 2 °Сга муздайт. Топ 1 500 м көтөрүлдү. Температура канчага өзгөрдү?</a:t>
             </a:r>
           </a:p>
         </p:txBody>
@@ -20383,7 +20383,7 @@
                 </a:solidFill>
                 <a:latin typeface="PT Sans"/>
               </a:rPr>
-              <a:t>Таңда кепеде −4 °C. Күн чыккандан кийин 3 саат бою ар саатта 3 °Cга жылыды. Канча градус болду?</a:t>
+              <a:t>Таңда кепеде −4 °C. Күн чыккандан кийин 3 саат бою ар саатта 3 °Сга жылыды. Канча градус болду?</a:t>
             </a:r>
           </a:p>
         </p:txBody>
@@ -25811,7 +25811,7 @@
                 </a:solidFill>
                 <a:latin typeface="PT Sans"/>
               </a:rPr>
-              <a:t>Альплагерде +8 °C. Ар бир 300 м өйдө аба 2 °Cга муздайт. Кепе 1 200 м жогору, түнкүсүн дагы 3 °C муздайт. Түнкүсүн кепеде канча градус?</a:t>
+              <a:t>Альплагерде +8 °C. Ар бир 300 м өйдө аба 2 °Сга муздайт. Кепе 1 200 м жогору, түнкүсүн дагы 3 °C муздайт. Түнкүсүн кепеде канча градус?</a:t>
             </a:r>
           </a:p>
         </p:txBody>
@@ -31263,7 +31263,7 @@
                 </a:solidFill>
                 <a:latin typeface="PT Sans"/>
               </a:rPr>
-              <a:t>Тоодо ар бир 300 м өйдө аба болжол менен 2 °Cга муздайт. Жылуу кийим керекпи?</a:t>
+              <a:t>Тоодо ар бир 300 м өйдө аба болжол менен 2 °Сга муздайт. Жылуу кийим керекпи?</a:t>
             </a:r>
           </a:p>
         </p:txBody>
@@ -31389,7 +31389,7 @@
                 </a:solidFill>
                 <a:latin typeface="PT Sans"/>
               </a:rPr>
-              <a:t>Альплагерде +8 °C. Ар бир 300 м өйдө аба 2 °Cга муздайт. Кепе 1 200 м жогору, түнкүсүн дагы 3 °C муздайт. Түнкүсүн кепеде канча градус?</a:t>
+              <a:t>Альплагерде +8 °C. Ар бир 300 м өйдө аба 2 °Сга муздайт. Кепе 1 200 м жогору, түнкүсүн дагы 3 °C муздайт. Түнкүсүн кепеде канча градус?</a:t>
             </a:r>
           </a:p>
         </p:txBody>
